--- a/material/Python/08_조건문.pptx
+++ b/material/Python/08_조건문.pptx
@@ -1,6 +1,6 @@
 
 <file path=ppt/presentation.xml><?xml version="1.0" encoding="utf-8"?>
-<p:presentation xmlns:a="http://schemas.openxmlformats.org/drawingml/2006/main" xmlns:r="http://schemas.openxmlformats.org/officeDocument/2006/relationships" xmlns:p="http://schemas.openxmlformats.org/presentationml/2006/main" saveSubsetFonts="1">
+<p:presentation xmlns:a="http://schemas.openxmlformats.org/drawingml/2006/main" xmlns:r="http://schemas.openxmlformats.org/officeDocument/2006/relationships" xmlns:p="http://schemas.openxmlformats.org/presentationml/2006/main" embedTrueTypeFonts="1" saveSubsetFonts="1">
   <p:sldMasterIdLst>
     <p:sldMasterId id="2147483660" r:id="rId1"/>
   </p:sldMasterIdLst>
@@ -57,6 +57,29 @@
   </p:sldIdLst>
   <p:sldSz cx="12192000" cy="6858000"/>
   <p:notesSz cx="6858000" cy="9144000"/>
+  <p:embeddedFontLst>
+    <p:embeddedFont>
+      <p:font typeface="G마켓 산스 TTF Bold" panose="02000000000000000000" pitchFamily="2" charset="-127"/>
+      <p:bold r:id="rId49"/>
+    </p:embeddedFont>
+    <p:embeddedFont>
+      <p:font typeface="Pretendard Black" panose="02000A03000000020004" pitchFamily="2" charset="-127"/>
+      <p:bold r:id="rId50"/>
+    </p:embeddedFont>
+    <p:embeddedFont>
+      <p:font typeface="Pretendard Light" panose="02000403000000020004" pitchFamily="2" charset="-127"/>
+      <p:regular r:id="rId51"/>
+    </p:embeddedFont>
+    <p:embeddedFont>
+      <p:font typeface="Pretendard Medium" panose="02000603000000020004" pitchFamily="2" charset="-127"/>
+      <p:regular r:id="rId52"/>
+    </p:embeddedFont>
+    <p:embeddedFont>
+      <p:font typeface="메이플스토리" panose="02000300000000000000" pitchFamily="2" charset="-127"/>
+      <p:regular r:id="rId53"/>
+      <p:bold r:id="rId54"/>
+    </p:embeddedFont>
+  </p:embeddedFontLst>
   <p:defaultTextStyle>
     <a:defPPr>
       <a:defRPr lang="ko-KR"/>
@@ -263,7 +286,7 @@
             <a:fld id="{A13A867C-D490-40C2-AB8D-A60FA70A9BF5}" type="datetimeFigureOut">
               <a:rPr lang="ko-KR" altLang="en-US" smtClean="0"/>
               <a:pPr/>
-              <a:t>2025-07-14</a:t>
+              <a:t>2025-08-21</a:t>
             </a:fld>
             <a:endParaRPr lang="ko-KR" altLang="en-US" dirty="0"/>
           </a:p>
@@ -4921,7 +4944,7 @@
           <a:p>
             <a:fld id="{442BEE3F-2E9A-4FD8-8B8A-8619F3E161C0}" type="datetime1">
               <a:rPr lang="ko-KR" altLang="en-US" smtClean="0"/>
-              <a:t>2025-07-14</a:t>
+              <a:t>2025-08-21</a:t>
             </a:fld>
             <a:endParaRPr lang="ko-KR" altLang="en-US"/>
           </a:p>
@@ -5208,7 +5231,7 @@
           <a:p>
             <a:fld id="{0F78D9C4-20C1-4B15-A116-16DC77AD9A1E}" type="datetime1">
               <a:rPr lang="ko-KR" altLang="en-US" smtClean="0"/>
-              <a:t>2025-07-14</a:t>
+              <a:t>2025-08-21</a:t>
             </a:fld>
             <a:endParaRPr lang="ko-KR" altLang="en-US"/>
           </a:p>
@@ -5383,7 +5406,7 @@
           <a:p>
             <a:fld id="{7F5E23C3-0E3D-4E4E-8486-D7FB4C073DC1}" type="datetime1">
               <a:rPr lang="ko-KR" altLang="en-US" smtClean="0"/>
-              <a:t>2025-07-14</a:t>
+              <a:t>2025-08-21</a:t>
             </a:fld>
             <a:endParaRPr lang="ko-KR" altLang="en-US"/>
           </a:p>
@@ -5712,7 +5735,7 @@
           <a:p>
             <a:fld id="{7F5E23C3-0E3D-4E4E-8486-D7FB4C073DC1}" type="datetime1">
               <a:rPr lang="ko-KR" altLang="en-US" smtClean="0"/>
-              <a:t>2025-07-14</a:t>
+              <a:t>2025-08-21</a:t>
             </a:fld>
             <a:endParaRPr lang="ko-KR" altLang="en-US"/>
           </a:p>
@@ -6603,7 +6626,7 @@
           <a:p>
             <a:fld id="{0F78D9C4-20C1-4B15-A116-16DC77AD9A1E}" type="datetime1">
               <a:rPr lang="ko-KR" altLang="en-US" smtClean="0"/>
-              <a:t>2025-07-14</a:t>
+              <a:t>2025-08-21</a:t>
             </a:fld>
             <a:endParaRPr lang="ko-KR" altLang="en-US"/>
           </a:p>
@@ -7094,7 +7117,7 @@
           <a:p>
             <a:fld id="{0F78D9C4-20C1-4B15-A116-16DC77AD9A1E}" type="datetime1">
               <a:rPr lang="ko-KR" altLang="en-US" smtClean="0"/>
-              <a:t>2025-07-14</a:t>
+              <a:t>2025-08-21</a:t>
             </a:fld>
             <a:endParaRPr lang="ko-KR" altLang="en-US"/>
           </a:p>
@@ -7601,7 +7624,7 @@
           <a:p>
             <a:fld id="{0F78D9C4-20C1-4B15-A116-16DC77AD9A1E}" type="datetime1">
               <a:rPr lang="ko-KR" altLang="en-US" smtClean="0"/>
-              <a:t>2025-07-14</a:t>
+              <a:t>2025-08-21</a:t>
             </a:fld>
             <a:endParaRPr lang="ko-KR" altLang="en-US"/>
           </a:p>
@@ -8092,7 +8115,7 @@
           <a:p>
             <a:fld id="{0F78D9C4-20C1-4B15-A116-16DC77AD9A1E}" type="datetime1">
               <a:rPr lang="ko-KR" altLang="en-US" smtClean="0"/>
-              <a:t>2025-07-14</a:t>
+              <a:t>2025-08-21</a:t>
             </a:fld>
             <a:endParaRPr lang="ko-KR" altLang="en-US"/>
           </a:p>
@@ -8674,7 +8697,7 @@
           <a:p>
             <a:fld id="{0F78D9C4-20C1-4B15-A116-16DC77AD9A1E}" type="datetime1">
               <a:rPr lang="ko-KR" altLang="en-US" smtClean="0"/>
-              <a:t>2025-07-14</a:t>
+              <a:t>2025-08-21</a:t>
             </a:fld>
             <a:endParaRPr lang="ko-KR" altLang="en-US"/>
           </a:p>
@@ -9145,7 +9168,7 @@
           <a:p>
             <a:fld id="{0F78D9C4-20C1-4B15-A116-16DC77AD9A1E}" type="datetime1">
               <a:rPr lang="ko-KR" altLang="en-US" smtClean="0"/>
-              <a:t>2025-07-14</a:t>
+              <a:t>2025-08-21</a:t>
             </a:fld>
             <a:endParaRPr lang="ko-KR" altLang="en-US"/>
           </a:p>
@@ -9604,7 +9627,7 @@
           <a:p>
             <a:fld id="{0F78D9C4-20C1-4B15-A116-16DC77AD9A1E}" type="datetime1">
               <a:rPr lang="ko-KR" altLang="en-US" smtClean="0"/>
-              <a:t>2025-07-14</a:t>
+              <a:t>2025-08-21</a:t>
             </a:fld>
             <a:endParaRPr lang="ko-KR" altLang="en-US"/>
           </a:p>
@@ -10158,7 +10181,7 @@
           <a:p>
             <a:fld id="{0F78D9C4-20C1-4B15-A116-16DC77AD9A1E}" type="datetime1">
               <a:rPr lang="ko-KR" altLang="en-US" smtClean="0"/>
-              <a:t>2025-07-14</a:t>
+              <a:t>2025-08-21</a:t>
             </a:fld>
             <a:endParaRPr lang="ko-KR" altLang="en-US"/>
           </a:p>
@@ -10608,7 +10631,7 @@
           <a:p>
             <a:fld id="{0F78D9C4-20C1-4B15-A116-16DC77AD9A1E}" type="datetime1">
               <a:rPr lang="ko-KR" altLang="en-US" smtClean="0"/>
-              <a:t>2025-07-14</a:t>
+              <a:t>2025-08-21</a:t>
             </a:fld>
             <a:endParaRPr lang="ko-KR" altLang="en-US"/>
           </a:p>
@@ -11127,7 +11150,7 @@
           <a:p>
             <a:fld id="{0F78D9C4-20C1-4B15-A116-16DC77AD9A1E}" type="datetime1">
               <a:rPr lang="ko-KR" altLang="en-US" smtClean="0"/>
-              <a:t>2025-07-14</a:t>
+              <a:t>2025-08-21</a:t>
             </a:fld>
             <a:endParaRPr lang="ko-KR" altLang="en-US"/>
           </a:p>
@@ -11690,7 +11713,7 @@
           <a:p>
             <a:fld id="{0F78D9C4-20C1-4B15-A116-16DC77AD9A1E}" type="datetime1">
               <a:rPr lang="ko-KR" altLang="en-US" smtClean="0"/>
-              <a:t>2025-07-14</a:t>
+              <a:t>2025-08-21</a:t>
             </a:fld>
             <a:endParaRPr lang="ko-KR" altLang="en-US"/>
           </a:p>
@@ -12280,7 +12303,7 @@
           <a:p>
             <a:fld id="{0F78D9C4-20C1-4B15-A116-16DC77AD9A1E}" type="datetime1">
               <a:rPr lang="ko-KR" altLang="en-US" smtClean="0"/>
-              <a:t>2025-07-14</a:t>
+              <a:t>2025-08-21</a:t>
             </a:fld>
             <a:endParaRPr lang="ko-KR" altLang="en-US"/>
           </a:p>
@@ -12840,7 +12863,7 @@
           <a:p>
             <a:fld id="{76022175-F16A-4A96-8E45-178BE9345AE9}" type="datetime6">
               <a:rPr lang="ko-KR" altLang="en-US" smtClean="0"/>
-              <a:t>2025년 7월</a:t>
+              <a:t>2025년 8월</a:t>
             </a:fld>
             <a:endParaRPr lang="ko-KR" altLang="en-US"/>
           </a:p>
@@ -13324,7 +13347,7 @@
           <a:p>
             <a:fld id="{0F78D9C4-20C1-4B15-A116-16DC77AD9A1E}" type="datetime1">
               <a:rPr lang="ko-KR" altLang="en-US" smtClean="0"/>
-              <a:t>2025-07-14</a:t>
+              <a:t>2025-08-21</a:t>
             </a:fld>
             <a:endParaRPr lang="ko-KR" altLang="en-US"/>
           </a:p>
@@ -13803,7 +13826,7 @@
           <a:p>
             <a:fld id="{0F78D9C4-20C1-4B15-A116-16DC77AD9A1E}" type="datetime1">
               <a:rPr lang="ko-KR" altLang="en-US" smtClean="0"/>
-              <a:t>2025-07-14</a:t>
+              <a:t>2025-08-21</a:t>
             </a:fld>
             <a:endParaRPr lang="ko-KR" altLang="en-US"/>
           </a:p>
@@ -14099,7 +14122,7 @@
           <a:p>
             <a:fld id="{0F78D9C4-20C1-4B15-A116-16DC77AD9A1E}" type="datetime1">
               <a:rPr lang="ko-KR" altLang="en-US" smtClean="0"/>
-              <a:t>2025-07-14</a:t>
+              <a:t>2025-08-21</a:t>
             </a:fld>
             <a:endParaRPr lang="ko-KR" altLang="en-US"/>
           </a:p>
@@ -14358,7 +14381,7 @@
           <a:p>
             <a:fld id="{0F78D9C4-20C1-4B15-A116-16DC77AD9A1E}" type="datetime1">
               <a:rPr lang="ko-KR" altLang="en-US" smtClean="0"/>
-              <a:t>2025-07-14</a:t>
+              <a:t>2025-08-21</a:t>
             </a:fld>
             <a:endParaRPr lang="ko-KR" altLang="en-US"/>
           </a:p>
@@ -14970,7 +14993,7 @@
           <a:p>
             <a:fld id="{0F78D9C4-20C1-4B15-A116-16DC77AD9A1E}" type="datetime1">
               <a:rPr lang="ko-KR" altLang="en-US" smtClean="0"/>
-              <a:t>2025-07-14</a:t>
+              <a:t>2025-08-21</a:t>
             </a:fld>
             <a:endParaRPr lang="ko-KR" altLang="en-US"/>
           </a:p>
@@ -15438,7 +15461,7 @@
           <a:p>
             <a:fld id="{76022175-F16A-4A96-8E45-178BE9345AE9}" type="datetime6">
               <a:rPr lang="ko-KR" altLang="en-US" smtClean="0"/>
-              <a:t>2025년 7월</a:t>
+              <a:t>2025년 8월</a:t>
             </a:fld>
             <a:endParaRPr lang="ko-KR" altLang="en-US"/>
           </a:p>
@@ -15930,7 +15953,7 @@
           <a:p>
             <a:fld id="{0F78D9C4-20C1-4B15-A116-16DC77AD9A1E}" type="datetime1">
               <a:rPr lang="ko-KR" altLang="en-US" smtClean="0"/>
-              <a:t>2025-07-14</a:t>
+              <a:t>2025-08-21</a:t>
             </a:fld>
             <a:endParaRPr lang="ko-KR" altLang="en-US"/>
           </a:p>
@@ -16371,7 +16394,7 @@
           <a:p>
             <a:fld id="{0F78D9C4-20C1-4B15-A116-16DC77AD9A1E}" type="datetime1">
               <a:rPr lang="ko-KR" altLang="en-US" smtClean="0"/>
-              <a:t>2025-07-14</a:t>
+              <a:t>2025-08-21</a:t>
             </a:fld>
             <a:endParaRPr lang="ko-KR" altLang="en-US"/>
           </a:p>
@@ -16728,7 +16751,7 @@
           <a:p>
             <a:fld id="{0F78D9C4-20C1-4B15-A116-16DC77AD9A1E}" type="datetime1">
               <a:rPr lang="ko-KR" altLang="en-US" smtClean="0"/>
-              <a:t>2025-07-14</a:t>
+              <a:t>2025-08-21</a:t>
             </a:fld>
             <a:endParaRPr lang="ko-KR" altLang="en-US"/>
           </a:p>
@@ -16981,7 +17004,7 @@
           <a:p>
             <a:fld id="{0F78D9C4-20C1-4B15-A116-16DC77AD9A1E}" type="datetime1">
               <a:rPr lang="ko-KR" altLang="en-US" smtClean="0"/>
-              <a:t>2025-07-14</a:t>
+              <a:t>2025-08-21</a:t>
             </a:fld>
             <a:endParaRPr lang="ko-KR" altLang="en-US"/>
           </a:p>
@@ -17190,7 +17213,7 @@
           <a:p>
             <a:fld id="{0F78D9C4-20C1-4B15-A116-16DC77AD9A1E}" type="datetime1">
               <a:rPr lang="ko-KR" altLang="en-US" smtClean="0"/>
-              <a:t>2025-07-14</a:t>
+              <a:t>2025-08-21</a:t>
             </a:fld>
             <a:endParaRPr lang="ko-KR" altLang="en-US"/>
           </a:p>
@@ -18260,7 +18283,7 @@
           <a:p>
             <a:fld id="{0F78D9C4-20C1-4B15-A116-16DC77AD9A1E}" type="datetime1">
               <a:rPr lang="ko-KR" altLang="en-US" smtClean="0"/>
-              <a:t>2025-07-14</a:t>
+              <a:t>2025-08-21</a:t>
             </a:fld>
             <a:endParaRPr lang="ko-KR" altLang="en-US"/>
           </a:p>
@@ -18741,7 +18764,7 @@
           <a:p>
             <a:fld id="{0F78D9C4-20C1-4B15-A116-16DC77AD9A1E}" type="datetime1">
               <a:rPr lang="ko-KR" altLang="en-US" smtClean="0"/>
-              <a:t>2025-07-14</a:t>
+              <a:t>2025-08-21</a:t>
             </a:fld>
             <a:endParaRPr lang="ko-KR" altLang="en-US"/>
           </a:p>
@@ -19305,7 +19328,7 @@
           <a:p>
             <a:fld id="{76022175-F16A-4A96-8E45-178BE9345AE9}" type="datetime6">
               <a:rPr lang="ko-KR" altLang="en-US" smtClean="0"/>
-              <a:t>2025년 7월</a:t>
+              <a:t>2025년 8월</a:t>
             </a:fld>
             <a:endParaRPr lang="ko-KR" altLang="en-US"/>
           </a:p>
@@ -20285,7 +20308,7 @@
           <a:p>
             <a:fld id="{0F78D9C4-20C1-4B15-A116-16DC77AD9A1E}" type="datetime1">
               <a:rPr lang="ko-KR" altLang="en-US" smtClean="0"/>
-              <a:t>2025-07-14</a:t>
+              <a:t>2025-08-21</a:t>
             </a:fld>
             <a:endParaRPr lang="ko-KR" altLang="en-US" dirty="0"/>
           </a:p>
@@ -23149,7 +23172,7 @@
           <a:p>
             <a:fld id="{76022175-F16A-4A96-8E45-178BE9345AE9}" type="datetime6">
               <a:rPr lang="ko-KR" altLang="en-US" smtClean="0"/>
-              <a:t>2025년 7월</a:t>
+              <a:t>2025년 8월</a:t>
             </a:fld>
             <a:endParaRPr lang="ko-KR" altLang="en-US"/>
           </a:p>
@@ -23862,7 +23885,7 @@
           <a:p>
             <a:fld id="{0F78D9C4-20C1-4B15-A116-16DC77AD9A1E}" type="datetime1">
               <a:rPr lang="ko-KR" altLang="en-US" smtClean="0"/>
-              <a:t>2025-07-14</a:t>
+              <a:t>2025-08-21</a:t>
             </a:fld>
             <a:endParaRPr lang="ko-KR" altLang="en-US"/>
           </a:p>
@@ -24401,7 +24424,7 @@
           <a:p>
             <a:fld id="{0F78D9C4-20C1-4B15-A116-16DC77AD9A1E}" type="datetime1">
               <a:rPr lang="ko-KR" altLang="en-US" smtClean="0"/>
-              <a:t>2025-07-14</a:t>
+              <a:t>2025-08-21</a:t>
             </a:fld>
             <a:endParaRPr lang="ko-KR" altLang="en-US"/>
           </a:p>
@@ -24583,7 +24606,7 @@
           <a:p>
             <a:fld id="{0F78D9C4-20C1-4B15-A116-16DC77AD9A1E}" type="datetime1">
               <a:rPr lang="ko-KR" altLang="en-US" smtClean="0"/>
-              <a:t>2025-07-14</a:t>
+              <a:t>2025-08-21</a:t>
             </a:fld>
             <a:endParaRPr lang="ko-KR" altLang="en-US"/>
           </a:p>
@@ -25336,7 +25359,7 @@
           <a:p>
             <a:fld id="{76022175-F16A-4A96-8E45-178BE9345AE9}" type="datetime6">
               <a:rPr lang="ko-KR" altLang="en-US" smtClean="0"/>
-              <a:t>2025년 7월</a:t>
+              <a:t>2025년 8월</a:t>
             </a:fld>
             <a:endParaRPr lang="ko-KR" altLang="en-US" dirty="0"/>
           </a:p>
@@ -25633,7 +25656,7 @@
           <a:p>
             <a:fld id="{0F78D9C4-20C1-4B15-A116-16DC77AD9A1E}" type="datetime1">
               <a:rPr lang="ko-KR" altLang="en-US" smtClean="0"/>
-              <a:t>2025-07-14</a:t>
+              <a:t>2025-08-21</a:t>
             </a:fld>
             <a:endParaRPr lang="ko-KR" altLang="en-US"/>
           </a:p>
@@ -27172,7 +27195,7 @@
           <a:p>
             <a:fld id="{0F78D9C4-20C1-4B15-A116-16DC77AD9A1E}" type="datetime1">
               <a:rPr lang="ko-KR" altLang="en-US" smtClean="0"/>
-              <a:t>2025-07-14</a:t>
+              <a:t>2025-08-21</a:t>
             </a:fld>
             <a:endParaRPr lang="ko-KR" altLang="en-US"/>
           </a:p>
@@ -27692,7 +27715,7 @@
           <a:p>
             <a:fld id="{0F78D9C4-20C1-4B15-A116-16DC77AD9A1E}" type="datetime1">
               <a:rPr lang="ko-KR" altLang="en-US" smtClean="0"/>
-              <a:t>2025-07-14</a:t>
+              <a:t>2025-08-21</a:t>
             </a:fld>
             <a:endParaRPr lang="ko-KR" altLang="en-US"/>
           </a:p>
@@ -28184,7 +28207,7 @@
           <a:p>
             <a:fld id="{0F78D9C4-20C1-4B15-A116-16DC77AD9A1E}" type="datetime1">
               <a:rPr lang="ko-KR" altLang="en-US" smtClean="0"/>
-              <a:t>2025-07-14</a:t>
+              <a:t>2025-08-21</a:t>
             </a:fld>
             <a:endParaRPr lang="ko-KR" altLang="en-US"/>
           </a:p>
